--- a/Referral-Partner-Presentation.pptx
+++ b/Referral-Partner-Presentation.pptx
@@ -4431,7 +4431,7 @@
                 <a:ea typeface="Calibri" pitchFamily="34" charset="-122"/>
                 <a:cs typeface="Calibri" pitchFamily="34" charset="-120"/>
               </a:rPr>
-              <a:t>Projected Commissions</a:t>
+              <a:t>Projected Fees</a:t>
             </a:r>
             <a:endParaRPr lang="en-US" sz="1100" dirty="0"/>
           </a:p>
@@ -4630,7 +4630,7 @@
                 <a:ea typeface="Calibri" pitchFamily="34" charset="-122"/>
                 <a:cs typeface="Calibri" pitchFamily="34" charset="-120"/>
               </a:rPr>
-              <a:t>Funded This Month</a:t>
+              <a:t>Funded</a:t>
             </a:r>
             <a:endParaRPr lang="en-US" sz="1100" dirty="0"/>
           </a:p>
@@ -4672,7 +4672,7 @@
                 <a:ea typeface="Calibri" pitchFamily="34" charset="-122"/>
                 <a:cs typeface="Calibri" pitchFamily="34" charset="-120"/>
               </a:rPr>
-              <a:t>Successfully funded deals</a:t>
+              <a:t>Closed fees and total</a:t>
             </a:r>
             <a:endParaRPr lang="en-US" sz="900" dirty="0"/>
           </a:p>
@@ -4692,7 +4692,7 @@
                 <a:ea typeface="Calibri" pitchFamily="34" charset="-122"/>
                 <a:cs typeface="Calibri" pitchFamily="34" charset="-120"/>
               </a:rPr>
-              <a:t>for the current month</a:t>
+              <a:t>funded deal volume</a:t>
             </a:r>
             <a:endParaRPr lang="en-US" sz="900" dirty="0"/>
           </a:p>
@@ -4829,7 +4829,7 @@
                 <a:ea typeface="Calibri" pitchFamily="34" charset="-122"/>
                 <a:cs typeface="Calibri" pitchFamily="34" charset="-120"/>
               </a:rPr>
-              <a:t>Referral Count</a:t>
+              <a:t>Your Network</a:t>
             </a:r>
             <a:endParaRPr lang="en-US" sz="1100" dirty="0"/>
           </a:p>
@@ -4871,7 +4871,7 @@
                 <a:ea typeface="Calibri" pitchFamily="34" charset="-122"/>
                 <a:cs typeface="Calibri" pitchFamily="34" charset="-120"/>
               </a:rPr>
-              <a:t>Total number of referrals</a:t>
+              <a:t>Active vendors and</a:t>
             </a:r>
             <a:endParaRPr lang="en-US" sz="900" dirty="0"/>
           </a:p>
@@ -4891,7 +4891,7 @@
                 <a:ea typeface="Calibri" pitchFamily="34" charset="-122"/>
                 <a:cs typeface="Calibri" pitchFamily="34" charset="-120"/>
               </a:rPr>
-              <a:t>you've submitted</a:t>
+              <a:t>referral partners</a:t>
             </a:r>
             <a:endParaRPr lang="en-US" sz="900" dirty="0"/>
           </a:p>
